--- a/Causal_Inference_Course/Week08_Instrumental_Variables_Mendelian_Randomization/Week08_Instrumental_Variables_Mendelian_Randomization_Lecture.pptx
+++ b/Causal_Inference_Course/Week08_Instrumental_Variables_Mendelian_Randomization/Week08_Instrumental_Variables_Mendelian_Randomization_Lecture.pptx
@@ -16441,7 +16441,69 @@
                 </a:solidFill>
                 <a:latin typeface="Calibri"/>
               </a:rPr>
-              <a:t>The in-class midterm spans Block I (causal question, potential outcomes, randomization, DAGs) and Block II (regression, matching &amp; propensity, weighting &amp; doubly-robust).</a:t>
+              <a:t>The in-class midterm spans Block I and Block II (Weeks 1–7).</a:t>
+            </a:r>
+          </a:p>
+          <a:p>
+            <a:pPr algn="l">
+              <a:lnSpc>
+                <a:spcPct val="102000"/>
+              </a:lnSpc>
+              <a:spcBef>
+                <a:spcPts val="0"/>
+              </a:spcBef>
+              <a:spcAft>
+                <a:spcPts val="900"/>
+              </a:spcAft>
+            </a:pPr>
+            <a:r>
+              <a:rPr sz="1500" b="1" i="0">
+                <a:solidFill>
+                  <a:srgbClr val="7F8694"/>
+                </a:solidFill>
+                <a:latin typeface="Calibri"/>
+              </a:rPr>
+              <a:t>·  </a:t>
+            </a:r>
+            <a:r>
+              <a:rPr sz="1500" b="0" i="0">
+                <a:solidFill>
+                  <a:srgbClr val="44546A"/>
+                </a:solidFill>
+                <a:latin typeface="Calibri"/>
+              </a:rPr>
+              <a:t>Block I: causal question, potential outcomes, randomization, DAGs.</a:t>
+            </a:r>
+          </a:p>
+          <a:p>
+            <a:pPr algn="l">
+              <a:lnSpc>
+                <a:spcPct val="102000"/>
+              </a:lnSpc>
+              <a:spcBef>
+                <a:spcPts val="0"/>
+              </a:spcBef>
+              <a:spcAft>
+                <a:spcPts val="900"/>
+              </a:spcAft>
+            </a:pPr>
+            <a:r>
+              <a:rPr sz="1500" b="1" i="0">
+                <a:solidFill>
+                  <a:srgbClr val="7F8694"/>
+                </a:solidFill>
+                <a:latin typeface="Calibri"/>
+              </a:rPr>
+              <a:t>·  </a:t>
+            </a:r>
+            <a:r>
+              <a:rPr sz="1500" b="0" i="0">
+                <a:solidFill>
+                  <a:srgbClr val="44546A"/>
+                </a:solidFill>
+                <a:latin typeface="Calibri"/>
+              </a:rPr>
+              <a:t>Block II: regression, matching &amp; propensity, weighting &amp; doubly-robust.</a:t>
             </a:r>
           </a:p>
           <a:p>
